--- a/public/fun/pack/pptx/family/가족소개_09_나혼자·1인가구_모내기날.pptx
+++ b/public/fun/pack/pptx/family/가족소개_09_나혼자·1인가구_모내기날.pptx
@@ -3347,7 +3347,7 @@
             <a:r>
               <a:rPr sz="3600" b="1" i="0">
                 <a:solidFill>
-                  <a:srgbClr val="1C401C"/>
+                  <a:srgbClr val="216E21"/>
                 </a:solidFill>
               </a:rPr>
               <a:t>우리 가족을 소개합니다</a:t>
@@ -3385,7 +3385,7 @@
             <a:r>
               <a:rPr sz="1700" b="0" i="1">
                 <a:solidFill>
-                  <a:srgbClr val="1C401C"/>
+                  <a:srgbClr val="216E21"/>
                 </a:solidFill>
               </a:rPr>
               <a:t>모내기 거들러 내려간 날</a:t>
@@ -3445,7 +3445,7 @@
     <p:bg>
       <p:bgPr>
         <a:solidFill>
-          <a:srgbClr val="F1F9F1"/>
+          <a:srgbClr val="F3FCF3"/>
         </a:solidFill>
         <a:effectLst/>
       </p:bgPr>
@@ -3472,7 +3472,7 @@
             <a:avLst/>
           </a:prstGeom>
           <a:solidFill>
-            <a:srgbClr val="3A883A"/>
+            <a:srgbClr val="4ECA4E"/>
           </a:solidFill>
           <a:ln>
             <a:noFill/>
@@ -3501,7 +3501,7 @@
             <a:avLst/>
           </a:prstGeom>
           <a:solidFill>
-            <a:srgbClr val="663D8F"/>
+            <a:srgbClr val="339941"/>
           </a:solidFill>
           <a:ln>
             <a:noFill/>
@@ -3545,7 +3545,7 @@
             <a:r>
               <a:rPr sz="3000" b="1" i="0">
                 <a:solidFill>
-                  <a:srgbClr val="1C401C"/>
+                  <a:srgbClr val="216E21"/>
                 </a:solidFill>
               </a:rPr>
               <a:t>가족 구성원</a:t>
@@ -3568,11 +3568,11 @@
             <a:avLst/>
           </a:prstGeom>
           <a:solidFill>
-            <a:srgbClr val="D3EED3"/>
+            <a:srgbClr val="D4F7D4"/>
           </a:solidFill>
           <a:ln w="19050">
             <a:solidFill>
-              <a:srgbClr val="3A883A"/>
+              <a:srgbClr val="4ECA4E"/>
             </a:solidFill>
             <a:prstDash val="dash"/>
           </a:ln>
@@ -3591,7 +3591,7 @@
             <a:r>
               <a:rPr sz="1200" b="0" i="0">
                 <a:solidFill>
-                  <a:srgbClr val="1C401C"/>
+                  <a:srgbClr val="216E21"/>
                 </a:solidFill>
               </a:rPr>
               <a:t>사진</a:t>
@@ -3629,7 +3629,7 @@
             <a:r>
               <a:rPr sz="1600" b="1" i="0">
                 <a:solidFill>
-                  <a:srgbClr val="1C401C"/>
+                  <a:srgbClr val="216E21"/>
                 </a:solidFill>
               </a:rPr>
               <a:t>나</a:t>
@@ -3720,11 +3720,11 @@
             <a:avLst/>
           </a:prstGeom>
           <a:solidFill>
-            <a:srgbClr val="D3EED3"/>
+            <a:srgbClr val="D4F7D4"/>
           </a:solidFill>
           <a:ln w="19050">
             <a:solidFill>
-              <a:srgbClr val="3A883A"/>
+              <a:srgbClr val="4ECA4E"/>
             </a:solidFill>
             <a:prstDash val="dash"/>
           </a:ln>
@@ -3743,7 +3743,7 @@
             <a:r>
               <a:rPr sz="1200" b="0" i="0">
                 <a:solidFill>
-                  <a:srgbClr val="1C401C"/>
+                  <a:srgbClr val="216E21"/>
                 </a:solidFill>
               </a:rPr>
               <a:t>사진</a:t>
@@ -3781,7 +3781,7 @@
             <a:r>
               <a:rPr sz="1600" b="1" i="0">
                 <a:solidFill>
-                  <a:srgbClr val="1C401C"/>
+                  <a:srgbClr val="216E21"/>
                 </a:solidFill>
               </a:rPr>
               <a:t>내 공간</a:t>
@@ -3872,11 +3872,11 @@
             <a:avLst/>
           </a:prstGeom>
           <a:solidFill>
-            <a:srgbClr val="D3EED3"/>
+            <a:srgbClr val="D4F7D4"/>
           </a:solidFill>
           <a:ln w="19050">
             <a:solidFill>
-              <a:srgbClr val="3A883A"/>
+              <a:srgbClr val="4ECA4E"/>
             </a:solidFill>
             <a:prstDash val="dash"/>
           </a:ln>
@@ -3895,7 +3895,7 @@
             <a:r>
               <a:rPr sz="1200" b="0" i="0">
                 <a:solidFill>
-                  <a:srgbClr val="1C401C"/>
+                  <a:srgbClr val="216E21"/>
                 </a:solidFill>
               </a:rPr>
               <a:t>사진</a:t>
@@ -3933,7 +3933,7 @@
             <a:r>
               <a:rPr sz="1600" b="1" i="0">
                 <a:solidFill>
-                  <a:srgbClr val="1C401C"/>
+                  <a:srgbClr val="216E21"/>
                 </a:solidFill>
               </a:rPr>
               <a:t>내 하루</a:t>
@@ -4023,7 +4023,7 @@
     <p:bg>
       <p:bgPr>
         <a:solidFill>
-          <a:srgbClr val="F1F9F1"/>
+          <a:srgbClr val="F3FCF3"/>
         </a:solidFill>
         <a:effectLst/>
       </p:bgPr>
@@ -4050,7 +4050,7 @@
             <a:avLst/>
           </a:prstGeom>
           <a:solidFill>
-            <a:srgbClr val="3A883A"/>
+            <a:srgbClr val="4ECA4E"/>
           </a:solidFill>
           <a:ln>
             <a:noFill/>
@@ -4079,7 +4079,7 @@
             <a:avLst/>
           </a:prstGeom>
           <a:solidFill>
-            <a:srgbClr val="663D8F"/>
+            <a:srgbClr val="339941"/>
           </a:solidFill>
           <a:ln>
             <a:noFill/>
@@ -4123,7 +4123,7 @@
             <a:r>
               <a:rPr sz="3000" b="1" i="0">
                 <a:solidFill>
-                  <a:srgbClr val="1C401C"/>
+                  <a:srgbClr val="216E21"/>
                 </a:solidFill>
               </a:rPr>
               <a:t>우리 가족 이야기</a:t>
@@ -4146,7 +4146,7 @@
             <a:avLst/>
           </a:prstGeom>
           <a:solidFill>
-            <a:srgbClr val="D3EED3"/>
+            <a:srgbClr val="D4F7D4"/>
           </a:solidFill>
           <a:ln>
             <a:noFill/>
@@ -4175,7 +4175,7 @@
             <a:avLst/>
           </a:prstGeom>
           <a:solidFill>
-            <a:srgbClr val="3A883A"/>
+            <a:srgbClr val="4ECA4E"/>
           </a:solidFill>
           <a:ln w="38100">
             <a:solidFill>
@@ -4221,7 +4221,7 @@
             <a:r>
               <a:rPr sz="1600" b="1" i="0">
                 <a:solidFill>
-                  <a:srgbClr val="3A883A"/>
+                  <a:srgbClr val="4ECA4E"/>
                 </a:solidFill>
               </a:rPr>
               <a:t>태어난 곳</a:t>
@@ -4259,7 +4259,7 @@
             <a:r>
               <a:rPr sz="1800" b="1" i="0">
                 <a:solidFill>
-                  <a:srgbClr val="1C401C"/>
+                  <a:srgbClr val="216E21"/>
                 </a:solidFill>
               </a:rPr>
               <a:t>나의 뿌리</a:t>
@@ -4320,7 +4320,7 @@
             <a:avLst/>
           </a:prstGeom>
           <a:solidFill>
-            <a:srgbClr val="3A883A"/>
+            <a:srgbClr val="4ECA4E"/>
           </a:solidFill>
           <a:ln w="38100">
             <a:solidFill>
@@ -4366,7 +4366,7 @@
             <a:r>
               <a:rPr sz="1600" b="1" i="0">
                 <a:solidFill>
-                  <a:srgbClr val="3A883A"/>
+                  <a:srgbClr val="4ECA4E"/>
                 </a:solidFill>
               </a:rPr>
               <a:t>학창 시절</a:t>
@@ -4404,7 +4404,7 @@
             <a:r>
               <a:rPr sz="1800" b="1" i="0">
                 <a:solidFill>
-                  <a:srgbClr val="1C401C"/>
+                  <a:srgbClr val="216E21"/>
                 </a:solidFill>
               </a:rPr>
               <a:t>자라던 시간</a:t>
@@ -4465,7 +4465,7 @@
             <a:avLst/>
           </a:prstGeom>
           <a:solidFill>
-            <a:srgbClr val="3A883A"/>
+            <a:srgbClr val="4ECA4E"/>
           </a:solidFill>
           <a:ln w="38100">
             <a:solidFill>
@@ -4511,7 +4511,7 @@
             <a:r>
               <a:rPr sz="1600" b="1" i="0">
                 <a:solidFill>
-                  <a:srgbClr val="3A883A"/>
+                  <a:srgbClr val="4ECA4E"/>
                 </a:solidFill>
               </a:rPr>
               <a:t>혼자 시작한 날</a:t>
@@ -4549,7 +4549,7 @@
             <a:r>
               <a:rPr sz="1800" b="1" i="0">
                 <a:solidFill>
-                  <a:srgbClr val="1C401C"/>
+                  <a:srgbClr val="216E21"/>
                 </a:solidFill>
               </a:rPr>
               <a:t>나의 첫 집</a:t>
@@ -4610,7 +4610,7 @@
             <a:avLst/>
           </a:prstGeom>
           <a:solidFill>
-            <a:srgbClr val="3A883A"/>
+            <a:srgbClr val="4ECA4E"/>
           </a:solidFill>
           <a:ln w="38100">
             <a:solidFill>
@@ -4656,7 +4656,7 @@
             <a:r>
               <a:rPr sz="1600" b="1" i="0">
                 <a:solidFill>
-                  <a:srgbClr val="3A883A"/>
+                  <a:srgbClr val="4ECA4E"/>
                 </a:solidFill>
               </a:rPr>
               <a:t>지금</a:t>
@@ -4694,7 +4694,7 @@
             <a:r>
               <a:rPr sz="1800" b="1" i="0">
                 <a:solidFill>
-                  <a:srgbClr val="1C401C"/>
+                  <a:srgbClr val="216E21"/>
                 </a:solidFill>
               </a:rPr>
               <a:t>오늘의 나</a:t>
@@ -4754,7 +4754,7 @@
     <p:bg>
       <p:bgPr>
         <a:solidFill>
-          <a:srgbClr val="F1F9F1"/>
+          <a:srgbClr val="F3FCF3"/>
         </a:solidFill>
         <a:effectLst/>
       </p:bgPr>
@@ -4781,7 +4781,7 @@
             <a:avLst/>
           </a:prstGeom>
           <a:solidFill>
-            <a:srgbClr val="3A883A"/>
+            <a:srgbClr val="4ECA4E"/>
           </a:solidFill>
           <a:ln>
             <a:noFill/>
@@ -4810,7 +4810,7 @@
             <a:avLst/>
           </a:prstGeom>
           <a:solidFill>
-            <a:srgbClr val="663D8F"/>
+            <a:srgbClr val="339941"/>
           </a:solidFill>
           <a:ln>
             <a:noFill/>
@@ -4854,7 +4854,7 @@
             <a:r>
               <a:rPr sz="3000" b="1" i="0">
                 <a:solidFill>
-                  <a:srgbClr val="1C401C"/>
+                  <a:srgbClr val="216E21"/>
                 </a:solidFill>
               </a:rPr>
               <a:t>우리 가족의 약속</a:t>
@@ -4879,11 +4879,11 @@
             </a:avLst>
           </a:prstGeom>
           <a:solidFill>
-            <a:srgbClr val="F1F9F1"/>
+            <a:srgbClr val="F3FCF3"/>
           </a:solidFill>
           <a:ln w="12700">
             <a:solidFill>
-              <a:srgbClr val="D3EED3"/>
+              <a:srgbClr val="D4F7D4"/>
             </a:solidFill>
           </a:ln>
         </p:spPr>
@@ -4910,7 +4910,7 @@
             <a:avLst/>
           </a:prstGeom>
           <a:solidFill>
-            <a:srgbClr val="3A883A"/>
+            <a:srgbClr val="4ECA4E"/>
           </a:solidFill>
           <a:ln>
             <a:noFill/>
@@ -4968,7 +4968,7 @@
             <a:r>
               <a:rPr sz="1800" b="1" i="0">
                 <a:solidFill>
-                  <a:srgbClr val="1C401C"/>
+                  <a:srgbClr val="216E21"/>
                 </a:solidFill>
               </a:rPr>
               <a:t>약속 1</a:t>
@@ -5031,11 +5031,11 @@
             </a:avLst>
           </a:prstGeom>
           <a:solidFill>
-            <a:srgbClr val="F1F9F1"/>
+            <a:srgbClr val="F3FCF3"/>
           </a:solidFill>
           <a:ln w="12700">
             <a:solidFill>
-              <a:srgbClr val="D3EED3"/>
+              <a:srgbClr val="D4F7D4"/>
             </a:solidFill>
           </a:ln>
         </p:spPr>
@@ -5062,7 +5062,7 @@
             <a:avLst/>
           </a:prstGeom>
           <a:solidFill>
-            <a:srgbClr val="3A883A"/>
+            <a:srgbClr val="4ECA4E"/>
           </a:solidFill>
           <a:ln>
             <a:noFill/>
@@ -5120,7 +5120,7 @@
             <a:r>
               <a:rPr sz="1800" b="1" i="0">
                 <a:solidFill>
-                  <a:srgbClr val="1C401C"/>
+                  <a:srgbClr val="216E21"/>
                 </a:solidFill>
               </a:rPr>
               <a:t>약속 2</a:t>
@@ -5183,11 +5183,11 @@
             </a:avLst>
           </a:prstGeom>
           <a:solidFill>
-            <a:srgbClr val="F1F9F1"/>
+            <a:srgbClr val="F3FCF3"/>
           </a:solidFill>
           <a:ln w="12700">
             <a:solidFill>
-              <a:srgbClr val="D3EED3"/>
+              <a:srgbClr val="D4F7D4"/>
             </a:solidFill>
           </a:ln>
         </p:spPr>
@@ -5214,7 +5214,7 @@
             <a:avLst/>
           </a:prstGeom>
           <a:solidFill>
-            <a:srgbClr val="3A883A"/>
+            <a:srgbClr val="4ECA4E"/>
           </a:solidFill>
           <a:ln>
             <a:noFill/>
@@ -5272,7 +5272,7 @@
             <a:r>
               <a:rPr sz="1800" b="1" i="0">
                 <a:solidFill>
-                  <a:srgbClr val="1C401C"/>
+                  <a:srgbClr val="216E21"/>
                 </a:solidFill>
               </a:rPr>
               <a:t>약속 3</a:t>
@@ -5332,7 +5332,7 @@
     <p:bg>
       <p:bgPr>
         <a:solidFill>
-          <a:srgbClr val="F1F9F1"/>
+          <a:srgbClr val="F3FCF3"/>
         </a:solidFill>
         <a:effectLst/>
       </p:bgPr>
@@ -5359,7 +5359,7 @@
             <a:avLst/>
           </a:prstGeom>
           <a:solidFill>
-            <a:srgbClr val="3A883A"/>
+            <a:srgbClr val="4ECA4E"/>
           </a:solidFill>
           <a:ln>
             <a:noFill/>
@@ -5388,7 +5388,7 @@
             <a:avLst/>
           </a:prstGeom>
           <a:solidFill>
-            <a:srgbClr val="663D8F"/>
+            <a:srgbClr val="339941"/>
           </a:solidFill>
           <a:ln>
             <a:noFill/>
@@ -5432,7 +5432,7 @@
             <a:r>
               <a:rPr sz="3000" b="1" i="0">
                 <a:solidFill>
-                  <a:srgbClr val="1C401C"/>
+                  <a:srgbClr val="216E21"/>
                 </a:solidFill>
               </a:rPr>
               <a:t>가족 사진</a:t>
@@ -5457,11 +5457,11 @@
             </a:avLst>
           </a:prstGeom>
           <a:solidFill>
-            <a:srgbClr val="D3EED3"/>
+            <a:srgbClr val="D4F7D4"/>
           </a:solidFill>
           <a:ln w="19050">
             <a:solidFill>
-              <a:srgbClr val="3A883A"/>
+              <a:srgbClr val="4ECA4E"/>
             </a:solidFill>
             <a:prstDash val="dash"/>
           </a:ln>
@@ -5480,7 +5480,7 @@
             <a:r>
               <a:rPr sz="1200" b="0" i="0">
                 <a:solidFill>
-                  <a:srgbClr val="1C401C"/>
+                  <a:srgbClr val="216E21"/>
                 </a:solidFill>
               </a:rPr>
               <a:t>사진 1</a:t>
@@ -5505,11 +5505,11 @@
             </a:avLst>
           </a:prstGeom>
           <a:solidFill>
-            <a:srgbClr val="D3EED3"/>
+            <a:srgbClr val="D4F7D4"/>
           </a:solidFill>
           <a:ln w="19050">
             <a:solidFill>
-              <a:srgbClr val="3A883A"/>
+              <a:srgbClr val="4ECA4E"/>
             </a:solidFill>
             <a:prstDash val="dash"/>
           </a:ln>
@@ -5528,7 +5528,7 @@
             <a:r>
               <a:rPr sz="1200" b="0" i="0">
                 <a:solidFill>
-                  <a:srgbClr val="1C401C"/>
+                  <a:srgbClr val="216E21"/>
                 </a:solidFill>
               </a:rPr>
               <a:t>사진 2</a:t>
@@ -5553,11 +5553,11 @@
             </a:avLst>
           </a:prstGeom>
           <a:solidFill>
-            <a:srgbClr val="D3EED3"/>
+            <a:srgbClr val="D4F7D4"/>
           </a:solidFill>
           <a:ln w="19050">
             <a:solidFill>
-              <a:srgbClr val="3A883A"/>
+              <a:srgbClr val="4ECA4E"/>
             </a:solidFill>
             <a:prstDash val="dash"/>
           </a:ln>
@@ -5576,7 +5576,7 @@
             <a:r>
               <a:rPr sz="1200" b="0" i="0">
                 <a:solidFill>
-                  <a:srgbClr val="1C401C"/>
+                  <a:srgbClr val="216E21"/>
                 </a:solidFill>
               </a:rPr>
               <a:t>사진 3</a:t>
@@ -5601,11 +5601,11 @@
             </a:avLst>
           </a:prstGeom>
           <a:solidFill>
-            <a:srgbClr val="D3EED3"/>
+            <a:srgbClr val="D4F7D4"/>
           </a:solidFill>
           <a:ln w="19050">
             <a:solidFill>
-              <a:srgbClr val="3A883A"/>
+              <a:srgbClr val="4ECA4E"/>
             </a:solidFill>
             <a:prstDash val="dash"/>
           </a:ln>
@@ -5624,7 +5624,7 @@
             <a:r>
               <a:rPr sz="1200" b="0" i="0">
                 <a:solidFill>
-                  <a:srgbClr val="1C401C"/>
+                  <a:srgbClr val="216E21"/>
                 </a:solidFill>
               </a:rPr>
               <a:t>사진 4</a:t>
@@ -5649,11 +5649,11 @@
             </a:avLst>
           </a:prstGeom>
           <a:solidFill>
-            <a:srgbClr val="D3EED3"/>
+            <a:srgbClr val="D4F7D4"/>
           </a:solidFill>
           <a:ln w="19050">
             <a:solidFill>
-              <a:srgbClr val="3A883A"/>
+              <a:srgbClr val="4ECA4E"/>
             </a:solidFill>
             <a:prstDash val="dash"/>
           </a:ln>
@@ -5672,7 +5672,7 @@
             <a:r>
               <a:rPr sz="1200" b="0" i="0">
                 <a:solidFill>
-                  <a:srgbClr val="1C401C"/>
+                  <a:srgbClr val="216E21"/>
                 </a:solidFill>
               </a:rPr>
               <a:t>사진 5</a:t>
@@ -5697,11 +5697,11 @@
             </a:avLst>
           </a:prstGeom>
           <a:solidFill>
-            <a:srgbClr val="D3EED3"/>
+            <a:srgbClr val="D4F7D4"/>
           </a:solidFill>
           <a:ln w="19050">
             <a:solidFill>
-              <a:srgbClr val="3A883A"/>
+              <a:srgbClr val="4ECA4E"/>
             </a:solidFill>
             <a:prstDash val="dash"/>
           </a:ln>
@@ -5720,7 +5720,7 @@
             <a:r>
               <a:rPr sz="1200" b="0" i="0">
                 <a:solidFill>
-                  <a:srgbClr val="1C401C"/>
+                  <a:srgbClr val="216E21"/>
                 </a:solidFill>
               </a:rPr>
               <a:t>사진 6</a:t>
@@ -5800,7 +5800,7 @@
             <a:r>
               <a:rPr sz="3600" b="1" i="0">
                 <a:solidFill>
-                  <a:srgbClr val="1C401C"/>
+                  <a:srgbClr val="216E21"/>
                 </a:solidFill>
               </a:rPr>
               <a:t>우리 가족 소개를 마칩니다</a:t>
@@ -5838,7 +5838,7 @@
             <a:r>
               <a:rPr sz="1700" b="0" i="1">
                 <a:solidFill>
-                  <a:srgbClr val="1C401C"/>
+                  <a:srgbClr val="216E21"/>
                 </a:solidFill>
               </a:rPr>
               <a:t>읽어 주셔서 고맙습니다</a:t>
@@ -5903,34 +5903,34 @@
         <a:sysClr val="window" lastClr="FFFFFF"/>
       </a:lt1>
       <a:dk2>
-        <a:srgbClr val="1C401C"/>
+        <a:srgbClr val="216E21"/>
       </a:dk2>
       <a:lt2>
-        <a:srgbClr val="F1F9F1"/>
+        <a:srgbClr val="F3FCF3"/>
       </a:lt2>
       <a:accent1>
-        <a:srgbClr val="3A883A"/>
+        <a:srgbClr val="4ECA4E"/>
       </a:accent1>
       <a:accent2>
-        <a:srgbClr val="663D8F"/>
+        <a:srgbClr val="339941"/>
       </a:accent2>
       <a:accent3>
-        <a:srgbClr val="1C401C"/>
+        <a:srgbClr val="216E21"/>
       </a:accent3>
       <a:accent4>
-        <a:srgbClr val="D3EED3"/>
+        <a:srgbClr val="D4F7D4"/>
       </a:accent4>
       <a:accent5>
-        <a:srgbClr val="506264"/>
+        <a:srgbClr val="40B248"/>
       </a:accent5>
       <a:accent6>
-        <a:srgbClr val="778C77"/>
+        <a:srgbClr val="7AA87A"/>
       </a:accent6>
       <a:hlink>
-        <a:srgbClr val="3A883A"/>
+        <a:srgbClr val="4ECA4E"/>
       </a:hlink>
       <a:folHlink>
-        <a:srgbClr val="1C401C"/>
+        <a:srgbClr val="216E21"/>
       </a:folHlink>
     </a:clrScheme>
     <a:fontScheme name="Office">

--- a/public/fun/pack/pptx/family/가족소개_09_나혼자·1인가구_모내기날.pptx
+++ b/public/fun/pack/pptx/family/가족소개_09_나혼자·1인가구_모내기날.pptx
@@ -3286,6 +3286,14 @@
 <file path=ppt/slides/slide1.xml><?xml version="1.0" encoding="utf-8"?>
 <p:sld xmlns:a="http://schemas.openxmlformats.org/drawingml/2006/main" xmlns:p="http://schemas.openxmlformats.org/presentationml/2006/main" xmlns:r="http://schemas.openxmlformats.org/officeDocument/2006/relationships">
   <p:cSld>
+    <p:bg>
+      <p:bgPr>
+        <a:solidFill>
+          <a:srgbClr val="EAFDEA"/>
+        </a:solidFill>
+        <a:effectLst/>
+      </p:bgPr>
+    </p:bg>
     <p:spTree>
       <p:nvGrpSpPr>
         <p:cNvPr id="1" name=""/>
@@ -3293,30 +3301,119 @@
         <p:nvPr/>
       </p:nvGrpSpPr>
       <p:grpSpPr/>
-      <p:pic>
-        <p:nvPicPr>
-          <p:cNvPr id="3" name="표지 그림" descr="family-09.jpg"/>
-          <p:cNvPicPr>
-            <a:picLocks noChangeAspect="1"/>
-          </p:cNvPicPr>
+      <p:sp>
+        <p:nvSpPr>
+          <p:cNvPr id="3" name="사진 자리"/>
+          <p:cNvSpPr/>
           <p:nvPr/>
-        </p:nvPicPr>
-        <p:blipFill>
-          <a:blip r:embed="rId2"/>
-          <a:stretch>
-            <a:fillRect/>
-          </a:stretch>
-        </p:blipFill>
-        <p:spPr>
-          <a:xfrm>
-            <a:off x="0" y="0"/>
-            <a:ext cx="12191695" cy="6858000"/>
+        </p:nvSpPr>
+        <p:spPr>
+          <a:xfrm>
+            <a:off x="1463003" y="685800"/>
+            <a:ext cx="3169840" cy="5486400"/>
+          </a:xfrm>
+          <a:prstGeom prst="round2SameRect">
+            <a:avLst>
+              <a:gd name="adj1" fmla="val 50000"/>
+              <a:gd name="adj2" fmla="val 0"/>
+            </a:avLst>
+          </a:prstGeom>
+          <a:solidFill>
+            <a:srgbClr val="A6F2A6"/>
+          </a:solidFill>
+          <a:ln>
+            <a:noFill/>
+          </a:ln>
+        </p:spPr>
+        <p:txBody>
+          <a:bodyPr rtlCol="0" anchor="ctr" wrap="square" lIns="54864" rIns="54864" tIns="27432" bIns="27432">
+            <a:noAutofit/>
+          </a:bodyPr>
+          <a:lstStyle/>
+          <a:p>
+            <a:pPr algn="ctr">
+              <a:lnSpc>
+                <a:spcPct val="100000"/>
+              </a:lnSpc>
+            </a:pPr>
+            <a:r>
+              <a:rPr sz="1400" b="0" i="0">
+                <a:solidFill>
+                  <a:srgbClr val="274927"/>
+                </a:solidFill>
+              </a:rPr>
+              <a:t>사진을 넣어 주세요</a:t>
+            </a:r>
+          </a:p>
+        </p:txBody>
+      </p:sp>
+      <p:sp>
+        <p:nvSpPr>
+          <p:cNvPr id="4" name="장식"/>
+          <p:cNvSpPr/>
+          <p:nvPr/>
+        </p:nvSpPr>
+        <p:spPr>
+          <a:xfrm>
+            <a:off x="4358505" y="4251960"/>
+            <a:ext cx="1005840" cy="1005840"/>
+          </a:xfrm>
+          <a:prstGeom prst="ellipse">
+            <a:avLst/>
+          </a:prstGeom>
+          <a:solidFill>
+            <a:srgbClr val="A6F2A6"/>
+          </a:solidFill>
+          <a:ln>
+            <a:noFill/>
+          </a:ln>
+        </p:spPr>
+        <p:txBody>
+          <a:bodyPr rtlCol="0" anchor="ctr"/>
+          <a:lstStyle/>
+          <a:p>
+            <a:pPr algn="ctr"/>
+          </a:p>
+        </p:txBody>
+      </p:sp>
+      <p:sp>
+        <p:nvSpPr>
+          <p:cNvPr id="5" name="라벨"/>
+          <p:cNvSpPr txBox="1"/>
+          <p:nvPr/>
+        </p:nvSpPr>
+        <p:spPr>
+          <a:xfrm>
+            <a:off x="6827349" y="2148840"/>
+            <a:ext cx="4632844" cy="274320"/>
           </a:xfrm>
           <a:prstGeom prst="rect">
             <a:avLst/>
           </a:prstGeom>
-        </p:spPr>
-      </p:pic>
+          <a:noFill/>
+        </p:spPr>
+        <p:txBody>
+          <a:bodyPr wrap="square" lIns="54864" rIns="54864" tIns="27432" bIns="27432" anchor="t">
+            <a:noAutofit/>
+          </a:bodyPr>
+          <a:lstStyle/>
+          <a:p>
+            <a:pPr algn="l">
+              <a:lnSpc>
+                <a:spcPct val="115000"/>
+              </a:lnSpc>
+            </a:pPr>
+            <a:r>
+              <a:rPr sz="1000" b="1" i="0" spc="250">
+                <a:solidFill>
+                  <a:srgbClr val="26231F"/>
+                </a:solidFill>
+              </a:rPr>
+              <a:t>FAMILY ALBUM</a:t>
+            </a:r>
+          </a:p>
+        </p:txBody>
+      </p:sp>
       <p:sp>
         <p:nvSpPr>
           <p:cNvPr id="2" name="Title 1"/>
@@ -3329,8 +3426,8 @@
         </p:nvSpPr>
         <p:spPr>
           <a:xfrm>
-            <a:off x="853418" y="2057400"/>
-            <a:ext cx="6095847" cy="1554480"/>
+            <a:off x="6827349" y="2606040"/>
+            <a:ext cx="4632844" cy="1188720"/>
           </a:xfrm>
         </p:spPr>
         <p:txBody>
@@ -3345,9 +3442,9 @@
               </a:lnSpc>
             </a:pPr>
             <a:r>
-              <a:rPr sz="3600" b="1" i="0">
-                <a:solidFill>
-                  <a:srgbClr val="216E21"/>
+              <a:rPr sz="4000" b="1" i="0">
+                <a:solidFill>
+                  <a:srgbClr val="26231F"/>
                 </a:solidFill>
               </a:rPr>
               <a:t>우리 가족을 소개합니다</a:t>
@@ -3357,14 +3454,14 @@
       </p:sp>
       <p:sp>
         <p:nvSpPr>
-          <p:cNvPr id="4" name="한 줄 문구"/>
+          <p:cNvPr id="6" name="한 줄 문구"/>
           <p:cNvSpPr txBox="1"/>
           <p:nvPr/>
         </p:nvSpPr>
         <p:spPr>
           <a:xfrm>
-            <a:off x="853418" y="3749039"/>
-            <a:ext cx="6095847" cy="822960"/>
+            <a:off x="6827349" y="3886200"/>
+            <a:ext cx="4632844" cy="822960"/>
           </a:xfrm>
           <a:prstGeom prst="rect">
             <a:avLst/>
@@ -3383,9 +3480,9 @@
               </a:lnSpc>
             </a:pPr>
             <a:r>
-              <a:rPr sz="1700" b="0" i="1">
-                <a:solidFill>
-                  <a:srgbClr val="216E21"/>
+              <a:rPr sz="1700" b="0" i="0">
+                <a:solidFill>
+                  <a:srgbClr val="26231F"/>
                 </a:solidFill>
               </a:rPr>
               <a:t>모내기 거들러 내려간 날</a:t>
@@ -3395,14 +3492,14 @@
       </p:sp>
       <p:sp>
         <p:nvSpPr>
-          <p:cNvPr id="5" name="안내 문구"/>
+          <p:cNvPr id="7" name="안내 문구"/>
           <p:cNvSpPr txBox="1"/>
           <p:nvPr/>
         </p:nvSpPr>
         <p:spPr>
           <a:xfrm>
-            <a:off x="853418" y="4617720"/>
-            <a:ext cx="6095847" cy="914400"/>
+            <a:off x="6827349" y="4754880"/>
+            <a:ext cx="4632844" cy="914400"/>
           </a:xfrm>
           <a:prstGeom prst="rect">
             <a:avLst/>
@@ -3423,10 +3520,10 @@
             <a:r>
               <a:rPr sz="1400" b="0" i="0">
                 <a:solidFill>
-                  <a:srgbClr val="666666"/>
+                  <a:srgbClr val="26231F"/>
                 </a:solidFill>
               </a:rPr>
-              <a:t>나 혼자 · 1인 가구 · 2027. 00. 00</a:t>
+              <a:t>나 혼자 · 1인 가구 · 날짜 입력</a:t>
             </a:r>
           </a:p>
         </p:txBody>
@@ -3445,7 +3542,7 @@
     <p:bg>
       <p:bgPr>
         <a:solidFill>
-          <a:srgbClr val="F3FCF3"/>
+          <a:srgbClr val="FFFFFF"/>
         </a:solidFill>
         <a:effectLst/>
       </p:bgPr>
@@ -3465,14 +3562,14 @@
         </p:nvSpPr>
         <p:spPr>
           <a:xfrm>
-            <a:off x="0" y="0"/>
-            <a:ext cx="12191695" cy="274320"/>
+            <a:off x="640080" y="6400800"/>
+            <a:ext cx="10911535" cy="10972"/>
           </a:xfrm>
           <a:prstGeom prst="rect">
             <a:avLst/>
           </a:prstGeom>
           <a:solidFill>
-            <a:srgbClr val="4ECA4E"/>
+            <a:srgbClr val="26231F"/>
           </a:solidFill>
           <a:ln>
             <a:noFill/>
@@ -3488,20 +3585,58 @@
       </p:sp>
       <p:sp>
         <p:nvSpPr>
-          <p:cNvPr id="4" name="장식"/>
+          <p:cNvPr id="4" name="하단 라벨"/>
+          <p:cNvSpPr txBox="1"/>
+          <p:nvPr/>
+        </p:nvSpPr>
+        <p:spPr>
+          <a:xfrm>
+            <a:off x="640080" y="6437376"/>
+            <a:ext cx="5486400" cy="274320"/>
+          </a:xfrm>
+          <a:prstGeom prst="rect">
+            <a:avLst/>
+          </a:prstGeom>
+          <a:noFill/>
+        </p:spPr>
+        <p:txBody>
+          <a:bodyPr wrap="square" lIns="54864" rIns="54864" tIns="27432" bIns="27432" anchor="ctr">
+            <a:noAutofit/>
+          </a:bodyPr>
+          <a:lstStyle/>
+          <a:p>
+            <a:pPr algn="l">
+              <a:lnSpc>
+                <a:spcPct val="115000"/>
+              </a:lnSpc>
+            </a:pPr>
+            <a:r>
+              <a:rPr sz="900" b="1" i="0" spc="250">
+                <a:solidFill>
+                  <a:srgbClr val="26231F"/>
+                </a:solidFill>
+              </a:rPr>
+              <a:t>FAMILY ALBUM</a:t>
+            </a:r>
+          </a:p>
+        </p:txBody>
+      </p:sp>
+      <p:sp>
+        <p:nvSpPr>
+          <p:cNvPr id="5" name="포인트"/>
           <p:cNvSpPr/>
           <p:nvPr/>
         </p:nvSpPr>
         <p:spPr>
-          <a:xfrm>
-            <a:off x="0" y="274320"/>
-            <a:ext cx="12191695" cy="54864"/>
-          </a:xfrm>
-          <a:prstGeom prst="rect">
+          <a:xfrm rot="18900000">
+            <a:off x="11213287" y="6473952"/>
+            <a:ext cx="219456" cy="219456"/>
+          </a:xfrm>
+          <a:prstGeom prst="teardrop">
             <a:avLst/>
           </a:prstGeom>
           <a:solidFill>
-            <a:srgbClr val="339941"/>
+            <a:srgbClr val="97ED97"/>
           </a:solidFill>
           <a:ln>
             <a:noFill/>
@@ -3527,8 +3662,8 @@
         </p:nvSpPr>
         <p:spPr>
           <a:xfrm>
-            <a:off x="640080" y="457200"/>
-            <a:ext cx="9722815" cy="868680"/>
+            <a:off x="640080" y="502920"/>
+            <a:ext cx="10911535" cy="914400"/>
           </a:xfrm>
         </p:spPr>
         <p:txBody>
@@ -3545,7 +3680,7 @@
             <a:r>
               <a:rPr sz="3000" b="1" i="0">
                 <a:solidFill>
-                  <a:srgbClr val="216E21"/>
+                  <a:srgbClr val="26231F"/>
                 </a:solidFill>
               </a:rPr>
               <a:t>가족 구성원</a:t>
@@ -3555,25 +3690,23 @@
       </p:sp>
       <p:sp>
         <p:nvSpPr>
-          <p:cNvPr id="5" name="사진 자리"/>
+          <p:cNvPr id="6" name="사진 자리"/>
           <p:cNvSpPr/>
           <p:nvPr/>
         </p:nvSpPr>
         <p:spPr>
           <a:xfrm>
-            <a:off x="1182319" y="1600200"/>
-            <a:ext cx="2400300" cy="2400300"/>
+            <a:off x="1239469" y="1600200"/>
+            <a:ext cx="2286000" cy="2286000"/>
           </a:xfrm>
           <a:prstGeom prst="ellipse">
             <a:avLst/>
           </a:prstGeom>
           <a:solidFill>
-            <a:srgbClr val="D4F7D4"/>
+            <a:srgbClr val="D1FAD1"/>
           </a:solidFill>
           <a:ln w="19050">
-            <a:solidFill>
-              <a:srgbClr val="4ECA4E"/>
-            </a:solidFill>
+            <a:noFill/>
             <a:prstDash val="dash"/>
           </a:ln>
         </p:spPr>
@@ -3591,7 +3724,7 @@
             <a:r>
               <a:rPr sz="1200" b="0" i="0">
                 <a:solidFill>
-                  <a:srgbClr val="216E21"/>
+                  <a:srgbClr val="8E8780"/>
                 </a:solidFill>
               </a:rPr>
               <a:t>사진</a:t>
@@ -3601,13 +3734,13 @@
       </p:sp>
       <p:sp>
         <p:nvSpPr>
-          <p:cNvPr id="6" name="TextBox 5"/>
+          <p:cNvPr id="7" name="TextBox 6"/>
           <p:cNvSpPr txBox="1"/>
           <p:nvPr/>
         </p:nvSpPr>
         <p:spPr>
           <a:xfrm>
-            <a:off x="640080" y="4091939"/>
+            <a:off x="640080" y="3977639"/>
             <a:ext cx="3484778" cy="411480"/>
           </a:xfrm>
           <a:prstGeom prst="rect">
@@ -3629,7 +3762,7 @@
             <a:r>
               <a:rPr sz="1600" b="1" i="0">
                 <a:solidFill>
-                  <a:srgbClr val="216E21"/>
+                  <a:srgbClr val="274927"/>
                 </a:solidFill>
               </a:rPr>
               <a:t>나</a:t>
@@ -3639,14 +3772,14 @@
       </p:sp>
       <p:sp>
         <p:nvSpPr>
-          <p:cNvPr id="7" name="TextBox 6"/>
+          <p:cNvPr id="8" name="TextBox 7"/>
           <p:cNvSpPr txBox="1"/>
           <p:nvPr/>
         </p:nvSpPr>
         <p:spPr>
           <a:xfrm>
-            <a:off x="731519" y="4549140"/>
-            <a:ext cx="3301898" cy="1851660"/>
+            <a:off x="731519" y="4434840"/>
+            <a:ext cx="3301898" cy="1737360"/>
           </a:xfrm>
           <a:prstGeom prst="rect">
             <a:avLst/>
@@ -3707,25 +3840,23 @@
       </p:sp>
       <p:sp>
         <p:nvSpPr>
-          <p:cNvPr id="8" name="사진 자리"/>
+          <p:cNvPr id="9" name="사진 자리"/>
           <p:cNvSpPr/>
           <p:nvPr/>
         </p:nvSpPr>
         <p:spPr>
           <a:xfrm>
-            <a:off x="4895697" y="1600200"/>
-            <a:ext cx="2400300" cy="2400300"/>
+            <a:off x="4952847" y="1600200"/>
+            <a:ext cx="2286000" cy="2286000"/>
           </a:xfrm>
           <a:prstGeom prst="ellipse">
             <a:avLst/>
           </a:prstGeom>
           <a:solidFill>
-            <a:srgbClr val="D4F7D4"/>
+            <a:srgbClr val="D1FAD1"/>
           </a:solidFill>
           <a:ln w="19050">
-            <a:solidFill>
-              <a:srgbClr val="4ECA4E"/>
-            </a:solidFill>
+            <a:noFill/>
             <a:prstDash val="dash"/>
           </a:ln>
         </p:spPr>
@@ -3743,7 +3874,7 @@
             <a:r>
               <a:rPr sz="1200" b="0" i="0">
                 <a:solidFill>
-                  <a:srgbClr val="216E21"/>
+                  <a:srgbClr val="8E8780"/>
                 </a:solidFill>
               </a:rPr>
               <a:t>사진</a:t>
@@ -3753,13 +3884,13 @@
       </p:sp>
       <p:sp>
         <p:nvSpPr>
-          <p:cNvPr id="9" name="TextBox 8"/>
+          <p:cNvPr id="10" name="TextBox 9"/>
           <p:cNvSpPr txBox="1"/>
           <p:nvPr/>
         </p:nvSpPr>
         <p:spPr>
           <a:xfrm>
-            <a:off x="4353458" y="4091939"/>
+            <a:off x="4353458" y="3977639"/>
             <a:ext cx="3484778" cy="411480"/>
           </a:xfrm>
           <a:prstGeom prst="rect">
@@ -3781,7 +3912,7 @@
             <a:r>
               <a:rPr sz="1600" b="1" i="0">
                 <a:solidFill>
-                  <a:srgbClr val="216E21"/>
+                  <a:srgbClr val="274927"/>
                 </a:solidFill>
               </a:rPr>
               <a:t>내 공간</a:t>
@@ -3791,14 +3922,14 @@
       </p:sp>
       <p:sp>
         <p:nvSpPr>
-          <p:cNvPr id="10" name="TextBox 9"/>
+          <p:cNvPr id="11" name="TextBox 10"/>
           <p:cNvSpPr txBox="1"/>
           <p:nvPr/>
         </p:nvSpPr>
         <p:spPr>
           <a:xfrm>
-            <a:off x="4444898" y="4549140"/>
-            <a:ext cx="3301898" cy="1851660"/>
+            <a:off x="4444898" y="4434840"/>
+            <a:ext cx="3301898" cy="1737360"/>
           </a:xfrm>
           <a:prstGeom prst="rect">
             <a:avLst/>
@@ -3859,25 +3990,23 @@
       </p:sp>
       <p:sp>
         <p:nvSpPr>
-          <p:cNvPr id="11" name="사진 자리"/>
+          <p:cNvPr id="12" name="사진 자리"/>
           <p:cNvSpPr/>
           <p:nvPr/>
         </p:nvSpPr>
         <p:spPr>
           <a:xfrm>
-            <a:off x="8609076" y="1600200"/>
-            <a:ext cx="2400300" cy="2400300"/>
+            <a:off x="8666226" y="1600200"/>
+            <a:ext cx="2286000" cy="2286000"/>
           </a:xfrm>
           <a:prstGeom prst="ellipse">
             <a:avLst/>
           </a:prstGeom>
           <a:solidFill>
-            <a:srgbClr val="D4F7D4"/>
+            <a:srgbClr val="D1FAD1"/>
           </a:solidFill>
           <a:ln w="19050">
-            <a:solidFill>
-              <a:srgbClr val="4ECA4E"/>
-            </a:solidFill>
+            <a:noFill/>
             <a:prstDash val="dash"/>
           </a:ln>
         </p:spPr>
@@ -3895,7 +4024,7 @@
             <a:r>
               <a:rPr sz="1200" b="0" i="0">
                 <a:solidFill>
-                  <a:srgbClr val="216E21"/>
+                  <a:srgbClr val="8E8780"/>
                 </a:solidFill>
               </a:rPr>
               <a:t>사진</a:t>
@@ -3905,13 +4034,13 @@
       </p:sp>
       <p:sp>
         <p:nvSpPr>
-          <p:cNvPr id="12" name="TextBox 11"/>
+          <p:cNvPr id="13" name="TextBox 12"/>
           <p:cNvSpPr txBox="1"/>
           <p:nvPr/>
         </p:nvSpPr>
         <p:spPr>
           <a:xfrm>
-            <a:off x="8066836" y="4091939"/>
+            <a:off x="8066836" y="3977639"/>
             <a:ext cx="3484778" cy="411480"/>
           </a:xfrm>
           <a:prstGeom prst="rect">
@@ -3933,7 +4062,7 @@
             <a:r>
               <a:rPr sz="1600" b="1" i="0">
                 <a:solidFill>
-                  <a:srgbClr val="216E21"/>
+                  <a:srgbClr val="274927"/>
                 </a:solidFill>
               </a:rPr>
               <a:t>내 하루</a:t>
@@ -3943,14 +4072,14 @@
       </p:sp>
       <p:sp>
         <p:nvSpPr>
-          <p:cNvPr id="13" name="TextBox 12"/>
+          <p:cNvPr id="14" name="TextBox 13"/>
           <p:cNvSpPr txBox="1"/>
           <p:nvPr/>
         </p:nvSpPr>
         <p:spPr>
           <a:xfrm>
-            <a:off x="8158276" y="4549140"/>
-            <a:ext cx="3301898" cy="1851660"/>
+            <a:off x="8158276" y="4434840"/>
+            <a:ext cx="3301898" cy="1737360"/>
           </a:xfrm>
           <a:prstGeom prst="rect">
             <a:avLst/>
@@ -4023,7 +4152,7 @@
     <p:bg>
       <p:bgPr>
         <a:solidFill>
-          <a:srgbClr val="F3FCF3"/>
+          <a:srgbClr val="FFFFFF"/>
         </a:solidFill>
         <a:effectLst/>
       </p:bgPr>
@@ -4043,14 +4172,14 @@
         </p:nvSpPr>
         <p:spPr>
           <a:xfrm>
-            <a:off x="0" y="0"/>
-            <a:ext cx="12191695" cy="274320"/>
+            <a:off x="640080" y="6400800"/>
+            <a:ext cx="10911535" cy="10972"/>
           </a:xfrm>
           <a:prstGeom prst="rect">
             <a:avLst/>
           </a:prstGeom>
           <a:solidFill>
-            <a:srgbClr val="4ECA4E"/>
+            <a:srgbClr val="26231F"/>
           </a:solidFill>
           <a:ln>
             <a:noFill/>
@@ -4066,20 +4195,58 @@
       </p:sp>
       <p:sp>
         <p:nvSpPr>
-          <p:cNvPr id="4" name="장식"/>
+          <p:cNvPr id="4" name="하단 라벨"/>
+          <p:cNvSpPr txBox="1"/>
+          <p:nvPr/>
+        </p:nvSpPr>
+        <p:spPr>
+          <a:xfrm>
+            <a:off x="640080" y="6437376"/>
+            <a:ext cx="5486400" cy="274320"/>
+          </a:xfrm>
+          <a:prstGeom prst="rect">
+            <a:avLst/>
+          </a:prstGeom>
+          <a:noFill/>
+        </p:spPr>
+        <p:txBody>
+          <a:bodyPr wrap="square" lIns="54864" rIns="54864" tIns="27432" bIns="27432" anchor="ctr">
+            <a:noAutofit/>
+          </a:bodyPr>
+          <a:lstStyle/>
+          <a:p>
+            <a:pPr algn="l">
+              <a:lnSpc>
+                <a:spcPct val="115000"/>
+              </a:lnSpc>
+            </a:pPr>
+            <a:r>
+              <a:rPr sz="900" b="1" i="0" spc="250">
+                <a:solidFill>
+                  <a:srgbClr val="26231F"/>
+                </a:solidFill>
+              </a:rPr>
+              <a:t>FAMILY ALBUM</a:t>
+            </a:r>
+          </a:p>
+        </p:txBody>
+      </p:sp>
+      <p:sp>
+        <p:nvSpPr>
+          <p:cNvPr id="5" name="포인트"/>
           <p:cNvSpPr/>
           <p:nvPr/>
         </p:nvSpPr>
         <p:spPr>
-          <a:xfrm>
-            <a:off x="0" y="274320"/>
-            <a:ext cx="12191695" cy="54864"/>
-          </a:xfrm>
-          <a:prstGeom prst="rect">
+          <a:xfrm rot="18900000">
+            <a:off x="11213287" y="6473952"/>
+            <a:ext cx="219456" cy="219456"/>
+          </a:xfrm>
+          <a:prstGeom prst="teardrop">
             <a:avLst/>
           </a:prstGeom>
           <a:solidFill>
-            <a:srgbClr val="339941"/>
+            <a:srgbClr val="97ED97"/>
           </a:solidFill>
           <a:ln>
             <a:noFill/>
@@ -4105,8 +4272,8 @@
         </p:nvSpPr>
         <p:spPr>
           <a:xfrm>
-            <a:off x="640080" y="457200"/>
-            <a:ext cx="9722815" cy="868680"/>
+            <a:off x="640080" y="502920"/>
+            <a:ext cx="10911535" cy="914400"/>
           </a:xfrm>
         </p:spPr>
         <p:txBody>
@@ -4123,7 +4290,7 @@
             <a:r>
               <a:rPr sz="3000" b="1" i="0">
                 <a:solidFill>
-                  <a:srgbClr val="216E21"/>
+                  <a:srgbClr val="26231F"/>
                 </a:solidFill>
               </a:rPr>
               <a:t>우리 가족 이야기</a:t>
@@ -4133,7 +4300,7 @@
       </p:sp>
       <p:sp>
         <p:nvSpPr>
-          <p:cNvPr id="5" name="타임라인 선"/>
+          <p:cNvPr id="6" name="타임라인 선"/>
           <p:cNvSpPr/>
           <p:nvPr/>
         </p:nvSpPr>
@@ -4146,7 +4313,7 @@
             <a:avLst/>
           </a:prstGeom>
           <a:solidFill>
-            <a:srgbClr val="D4F7D4"/>
+            <a:srgbClr val="D1FAD1"/>
           </a:solidFill>
           <a:ln>
             <a:noFill/>
@@ -4162,7 +4329,7 @@
       </p:sp>
       <p:sp>
         <p:nvSpPr>
-          <p:cNvPr id="6" name="때 1"/>
+          <p:cNvPr id="7" name="때 1"/>
           <p:cNvSpPr/>
           <p:nvPr/>
         </p:nvSpPr>
@@ -4175,7 +4342,7 @@
             <a:avLst/>
           </a:prstGeom>
           <a:solidFill>
-            <a:srgbClr val="4ECA4E"/>
+            <a:srgbClr val="97ED97"/>
           </a:solidFill>
           <a:ln w="38100">
             <a:solidFill>
@@ -4193,7 +4360,7 @@
       </p:sp>
       <p:sp>
         <p:nvSpPr>
-          <p:cNvPr id="7" name="TextBox 6"/>
+          <p:cNvPr id="8" name="TextBox 7"/>
           <p:cNvSpPr txBox="1"/>
           <p:nvPr/>
         </p:nvSpPr>
@@ -4221,7 +4388,7 @@
             <a:r>
               <a:rPr sz="1600" b="1" i="0">
                 <a:solidFill>
-                  <a:srgbClr val="4ECA4E"/>
+                  <a:srgbClr val="97ED97"/>
                 </a:solidFill>
               </a:rPr>
               <a:t>태어난 곳</a:t>
@@ -4231,7 +4398,7 @@
       </p:sp>
       <p:sp>
         <p:nvSpPr>
-          <p:cNvPr id="8" name="TextBox 7"/>
+          <p:cNvPr id="9" name="TextBox 8"/>
           <p:cNvSpPr txBox="1"/>
           <p:nvPr/>
         </p:nvSpPr>
@@ -4259,7 +4426,7 @@
             <a:r>
               <a:rPr sz="1800" b="1" i="0">
                 <a:solidFill>
-                  <a:srgbClr val="216E21"/>
+                  <a:srgbClr val="274927"/>
                 </a:solidFill>
               </a:rPr>
               <a:t>나의 뿌리</a:t>
@@ -4269,7 +4436,7 @@
       </p:sp>
       <p:sp>
         <p:nvSpPr>
-          <p:cNvPr id="9" name="TextBox 8"/>
+          <p:cNvPr id="10" name="TextBox 9"/>
           <p:cNvSpPr txBox="1"/>
           <p:nvPr/>
         </p:nvSpPr>
@@ -4297,7 +4464,7 @@
             <a:r>
               <a:rPr sz="1500" b="0" i="0">
                 <a:solidFill>
-                  <a:srgbClr val="2B2B2B"/>
+                  <a:srgbClr val="26231F"/>
                 </a:solidFill>
               </a:rPr>
               <a:t>고향의 기억을 적어요</a:t>
@@ -4307,7 +4474,7 @@
       </p:sp>
       <p:sp>
         <p:nvSpPr>
-          <p:cNvPr id="10" name="때 2"/>
+          <p:cNvPr id="11" name="때 2"/>
           <p:cNvSpPr/>
           <p:nvPr/>
         </p:nvSpPr>
@@ -4320,7 +4487,7 @@
             <a:avLst/>
           </a:prstGeom>
           <a:solidFill>
-            <a:srgbClr val="4ECA4E"/>
+            <a:srgbClr val="97ED97"/>
           </a:solidFill>
           <a:ln w="38100">
             <a:solidFill>
@@ -4338,7 +4505,7 @@
       </p:sp>
       <p:sp>
         <p:nvSpPr>
-          <p:cNvPr id="11" name="TextBox 10"/>
+          <p:cNvPr id="12" name="TextBox 11"/>
           <p:cNvSpPr txBox="1"/>
           <p:nvPr/>
         </p:nvSpPr>
@@ -4366,7 +4533,7 @@
             <a:r>
               <a:rPr sz="1600" b="1" i="0">
                 <a:solidFill>
-                  <a:srgbClr val="4ECA4E"/>
+                  <a:srgbClr val="97ED97"/>
                 </a:solidFill>
               </a:rPr>
               <a:t>학창 시절</a:t>
@@ -4376,7 +4543,7 @@
       </p:sp>
       <p:sp>
         <p:nvSpPr>
-          <p:cNvPr id="12" name="TextBox 11"/>
+          <p:cNvPr id="13" name="TextBox 12"/>
           <p:cNvSpPr txBox="1"/>
           <p:nvPr/>
         </p:nvSpPr>
@@ -4404,7 +4571,7 @@
             <a:r>
               <a:rPr sz="1800" b="1" i="0">
                 <a:solidFill>
-                  <a:srgbClr val="216E21"/>
+                  <a:srgbClr val="274927"/>
                 </a:solidFill>
               </a:rPr>
               <a:t>자라던 시간</a:t>
@@ -4414,7 +4581,7 @@
       </p:sp>
       <p:sp>
         <p:nvSpPr>
-          <p:cNvPr id="13" name="TextBox 12"/>
+          <p:cNvPr id="14" name="TextBox 13"/>
           <p:cNvSpPr txBox="1"/>
           <p:nvPr/>
         </p:nvSpPr>
@@ -4442,7 +4609,7 @@
             <a:r>
               <a:rPr sz="1500" b="0" i="0">
                 <a:solidFill>
-                  <a:srgbClr val="2B2B2B"/>
+                  <a:srgbClr val="26231F"/>
                 </a:solidFill>
               </a:rPr>
               <a:t>가장 좋았던 기억</a:t>
@@ -4452,7 +4619,7 @@
       </p:sp>
       <p:sp>
         <p:nvSpPr>
-          <p:cNvPr id="14" name="때 3"/>
+          <p:cNvPr id="15" name="때 3"/>
           <p:cNvSpPr/>
           <p:nvPr/>
         </p:nvSpPr>
@@ -4465,7 +4632,7 @@
             <a:avLst/>
           </a:prstGeom>
           <a:solidFill>
-            <a:srgbClr val="4ECA4E"/>
+            <a:srgbClr val="97ED97"/>
           </a:solidFill>
           <a:ln w="38100">
             <a:solidFill>
@@ -4483,7 +4650,7 @@
       </p:sp>
       <p:sp>
         <p:nvSpPr>
-          <p:cNvPr id="15" name="TextBox 14"/>
+          <p:cNvPr id="16" name="TextBox 15"/>
           <p:cNvSpPr txBox="1"/>
           <p:nvPr/>
         </p:nvSpPr>
@@ -4511,7 +4678,7 @@
             <a:r>
               <a:rPr sz="1600" b="1" i="0">
                 <a:solidFill>
-                  <a:srgbClr val="4ECA4E"/>
+                  <a:srgbClr val="97ED97"/>
                 </a:solidFill>
               </a:rPr>
               <a:t>혼자 시작한 날</a:t>
@@ -4521,7 +4688,7 @@
       </p:sp>
       <p:sp>
         <p:nvSpPr>
-          <p:cNvPr id="16" name="TextBox 15"/>
+          <p:cNvPr id="17" name="TextBox 16"/>
           <p:cNvSpPr txBox="1"/>
           <p:nvPr/>
         </p:nvSpPr>
@@ -4549,7 +4716,7 @@
             <a:r>
               <a:rPr sz="1800" b="1" i="0">
                 <a:solidFill>
-                  <a:srgbClr val="216E21"/>
+                  <a:srgbClr val="274927"/>
                 </a:solidFill>
               </a:rPr>
               <a:t>나의 첫 집</a:t>
@@ -4559,7 +4726,7 @@
       </p:sp>
       <p:sp>
         <p:nvSpPr>
-          <p:cNvPr id="17" name="TextBox 16"/>
+          <p:cNvPr id="18" name="TextBox 17"/>
           <p:cNvSpPr txBox="1"/>
           <p:nvPr/>
         </p:nvSpPr>
@@ -4587,7 +4754,7 @@
             <a:r>
               <a:rPr sz="1500" b="0" i="0">
                 <a:solidFill>
-                  <a:srgbClr val="2B2B2B"/>
+                  <a:srgbClr val="26231F"/>
                 </a:solidFill>
               </a:rPr>
               <a:t>독립하던 날</a:t>
@@ -4597,7 +4764,7 @@
       </p:sp>
       <p:sp>
         <p:nvSpPr>
-          <p:cNvPr id="18" name="때 4"/>
+          <p:cNvPr id="19" name="때 4"/>
           <p:cNvSpPr/>
           <p:nvPr/>
         </p:nvSpPr>
@@ -4610,7 +4777,7 @@
             <a:avLst/>
           </a:prstGeom>
           <a:solidFill>
-            <a:srgbClr val="4ECA4E"/>
+            <a:srgbClr val="97ED97"/>
           </a:solidFill>
           <a:ln w="38100">
             <a:solidFill>
@@ -4628,7 +4795,7 @@
       </p:sp>
       <p:sp>
         <p:nvSpPr>
-          <p:cNvPr id="19" name="TextBox 18"/>
+          <p:cNvPr id="20" name="TextBox 19"/>
           <p:cNvSpPr txBox="1"/>
           <p:nvPr/>
         </p:nvSpPr>
@@ -4656,7 +4823,7 @@
             <a:r>
               <a:rPr sz="1600" b="1" i="0">
                 <a:solidFill>
-                  <a:srgbClr val="4ECA4E"/>
+                  <a:srgbClr val="97ED97"/>
                 </a:solidFill>
               </a:rPr>
               <a:t>지금</a:t>
@@ -4666,7 +4833,7 @@
       </p:sp>
       <p:sp>
         <p:nvSpPr>
-          <p:cNvPr id="20" name="TextBox 19"/>
+          <p:cNvPr id="21" name="TextBox 20"/>
           <p:cNvSpPr txBox="1"/>
           <p:nvPr/>
         </p:nvSpPr>
@@ -4694,7 +4861,7 @@
             <a:r>
               <a:rPr sz="1800" b="1" i="0">
                 <a:solidFill>
-                  <a:srgbClr val="216E21"/>
+                  <a:srgbClr val="274927"/>
                 </a:solidFill>
               </a:rPr>
               <a:t>오늘의 나</a:t>
@@ -4704,7 +4871,7 @@
       </p:sp>
       <p:sp>
         <p:nvSpPr>
-          <p:cNvPr id="21" name="TextBox 20"/>
+          <p:cNvPr id="22" name="TextBox 21"/>
           <p:cNvSpPr txBox="1"/>
           <p:nvPr/>
         </p:nvSpPr>
@@ -4732,7 +4899,7 @@
             <a:r>
               <a:rPr sz="1500" b="0" i="0">
                 <a:solidFill>
-                  <a:srgbClr val="2B2B2B"/>
+                  <a:srgbClr val="26231F"/>
                 </a:solidFill>
               </a:rPr>
               <a:t>요즘 내 이야기</a:t>
@@ -4754,7 +4921,7 @@
     <p:bg>
       <p:bgPr>
         <a:solidFill>
-          <a:srgbClr val="F3FCF3"/>
+          <a:srgbClr val="FFFFFF"/>
         </a:solidFill>
         <a:effectLst/>
       </p:bgPr>
@@ -4774,14 +4941,14 @@
         </p:nvSpPr>
         <p:spPr>
           <a:xfrm>
-            <a:off x="0" y="0"/>
-            <a:ext cx="12191695" cy="274320"/>
+            <a:off x="640080" y="6400800"/>
+            <a:ext cx="10911535" cy="10972"/>
           </a:xfrm>
           <a:prstGeom prst="rect">
             <a:avLst/>
           </a:prstGeom>
           <a:solidFill>
-            <a:srgbClr val="4ECA4E"/>
+            <a:srgbClr val="26231F"/>
           </a:solidFill>
           <a:ln>
             <a:noFill/>
@@ -4797,20 +4964,58 @@
       </p:sp>
       <p:sp>
         <p:nvSpPr>
-          <p:cNvPr id="4" name="장식"/>
+          <p:cNvPr id="4" name="하단 라벨"/>
+          <p:cNvSpPr txBox="1"/>
+          <p:nvPr/>
+        </p:nvSpPr>
+        <p:spPr>
+          <a:xfrm>
+            <a:off x="640080" y="6437376"/>
+            <a:ext cx="5486400" cy="274320"/>
+          </a:xfrm>
+          <a:prstGeom prst="rect">
+            <a:avLst/>
+          </a:prstGeom>
+          <a:noFill/>
+        </p:spPr>
+        <p:txBody>
+          <a:bodyPr wrap="square" lIns="54864" rIns="54864" tIns="27432" bIns="27432" anchor="ctr">
+            <a:noAutofit/>
+          </a:bodyPr>
+          <a:lstStyle/>
+          <a:p>
+            <a:pPr algn="l">
+              <a:lnSpc>
+                <a:spcPct val="115000"/>
+              </a:lnSpc>
+            </a:pPr>
+            <a:r>
+              <a:rPr sz="900" b="1" i="0" spc="250">
+                <a:solidFill>
+                  <a:srgbClr val="26231F"/>
+                </a:solidFill>
+              </a:rPr>
+              <a:t>FAMILY ALBUM</a:t>
+            </a:r>
+          </a:p>
+        </p:txBody>
+      </p:sp>
+      <p:sp>
+        <p:nvSpPr>
+          <p:cNvPr id="5" name="포인트"/>
           <p:cNvSpPr/>
           <p:nvPr/>
         </p:nvSpPr>
         <p:spPr>
-          <a:xfrm>
-            <a:off x="0" y="274320"/>
-            <a:ext cx="12191695" cy="54864"/>
-          </a:xfrm>
-          <a:prstGeom prst="rect">
+          <a:xfrm rot="18900000">
+            <a:off x="11213287" y="6473952"/>
+            <a:ext cx="219456" cy="219456"/>
+          </a:xfrm>
+          <a:prstGeom prst="teardrop">
             <a:avLst/>
           </a:prstGeom>
           <a:solidFill>
-            <a:srgbClr val="339941"/>
+            <a:srgbClr val="97ED97"/>
           </a:solidFill>
           <a:ln>
             <a:noFill/>
@@ -4836,8 +5041,8 @@
         </p:nvSpPr>
         <p:spPr>
           <a:xfrm>
-            <a:off x="640080" y="457200"/>
-            <a:ext cx="9722815" cy="868680"/>
+            <a:off x="640080" y="502920"/>
+            <a:ext cx="10911535" cy="914400"/>
           </a:xfrm>
         </p:spPr>
         <p:txBody>
@@ -4854,7 +5059,7 @@
             <a:r>
               <a:rPr sz="3000" b="1" i="0">
                 <a:solidFill>
-                  <a:srgbClr val="216E21"/>
+                  <a:srgbClr val="26231F"/>
                 </a:solidFill>
               </a:rPr>
               <a:t>우리 가족의 약속</a:t>
@@ -4864,7 +5069,7 @@
       </p:sp>
       <p:sp>
         <p:nvSpPr>
-          <p:cNvPr id="5" name="줄 1"/>
+          <p:cNvPr id="6" name="줄 1"/>
           <p:cNvSpPr/>
           <p:nvPr/>
         </p:nvSpPr>
@@ -4875,15 +5080,15 @@
           </a:xfrm>
           <a:prstGeom prst="roundRect">
             <a:avLst>
-              <a:gd name="adj" fmla="val 8000"/>
+              <a:gd name="adj" fmla="val 7000"/>
             </a:avLst>
           </a:prstGeom>
           <a:solidFill>
-            <a:srgbClr val="F3FCF3"/>
+            <a:srgbClr val="FFFFFF"/>
           </a:solidFill>
           <a:ln w="12700">
             <a:solidFill>
-              <a:srgbClr val="D4F7D4"/>
+              <a:srgbClr val="A6F2A6"/>
             </a:solidFill>
           </a:ln>
         </p:spPr>
@@ -4897,7 +5102,7 @@
       </p:sp>
       <p:sp>
         <p:nvSpPr>
-          <p:cNvPr id="6" name="번호 1"/>
+          <p:cNvPr id="7" name="번호 1"/>
           <p:cNvSpPr/>
           <p:nvPr/>
         </p:nvSpPr>
@@ -4906,11 +5111,13 @@
             <a:off x="822959" y="1874519"/>
             <a:ext cx="457200" cy="457200"/>
           </a:xfrm>
-          <a:prstGeom prst="ellipse">
-            <a:avLst/>
+          <a:prstGeom prst="roundRect">
+            <a:avLst>
+              <a:gd name="adj" fmla="val 25000"/>
+            </a:avLst>
           </a:prstGeom>
           <a:solidFill>
-            <a:srgbClr val="4ECA4E"/>
+            <a:srgbClr val="97ED97"/>
           </a:solidFill>
           <a:ln>
             <a:noFill/>
@@ -4930,7 +5137,7 @@
             <a:r>
               <a:rPr sz="1600" b="1" i="0">
                 <a:solidFill>
-                  <a:srgbClr val="FFFFFF"/>
+                  <a:srgbClr val="26231F"/>
                 </a:solidFill>
               </a:rPr>
               <a:t>1</a:t>
@@ -4940,7 +5147,7 @@
       </p:sp>
       <p:sp>
         <p:nvSpPr>
-          <p:cNvPr id="7" name="TextBox 6"/>
+          <p:cNvPr id="8" name="TextBox 7"/>
           <p:cNvSpPr txBox="1"/>
           <p:nvPr/>
         </p:nvSpPr>
@@ -4968,7 +5175,7 @@
             <a:r>
               <a:rPr sz="1800" b="1" i="0">
                 <a:solidFill>
-                  <a:srgbClr val="216E21"/>
+                  <a:srgbClr val="274927"/>
                 </a:solidFill>
               </a:rPr>
               <a:t>약속 1</a:t>
@@ -4978,7 +5185,7 @@
       </p:sp>
       <p:sp>
         <p:nvSpPr>
-          <p:cNvPr id="8" name="TextBox 7"/>
+          <p:cNvPr id="9" name="TextBox 8"/>
           <p:cNvSpPr txBox="1"/>
           <p:nvPr/>
         </p:nvSpPr>
@@ -5006,7 +5213,7 @@
             <a:r>
               <a:rPr sz="1700" b="0" i="0">
                 <a:solidFill>
-                  <a:srgbClr val="2B2B2B"/>
+                  <a:srgbClr val="26231F"/>
                 </a:solidFill>
               </a:rPr>
               <a:t>나를 위한 밥상 차리기</a:t>
@@ -5016,7 +5223,7 @@
       </p:sp>
       <p:sp>
         <p:nvSpPr>
-          <p:cNvPr id="9" name="줄 2"/>
+          <p:cNvPr id="10" name="줄 2"/>
           <p:cNvSpPr/>
           <p:nvPr/>
         </p:nvSpPr>
@@ -5027,15 +5234,15 @@
           </a:xfrm>
           <a:prstGeom prst="roundRect">
             <a:avLst>
-              <a:gd name="adj" fmla="val 8000"/>
+              <a:gd name="adj" fmla="val 7000"/>
             </a:avLst>
           </a:prstGeom>
           <a:solidFill>
-            <a:srgbClr val="F3FCF3"/>
+            <a:srgbClr val="FFFFFF"/>
           </a:solidFill>
           <a:ln w="12700">
             <a:solidFill>
-              <a:srgbClr val="D4F7D4"/>
+              <a:srgbClr val="A6F2A6"/>
             </a:solidFill>
           </a:ln>
         </p:spPr>
@@ -5049,7 +5256,7 @@
       </p:sp>
       <p:sp>
         <p:nvSpPr>
-          <p:cNvPr id="10" name="번호 2"/>
+          <p:cNvPr id="11" name="번호 2"/>
           <p:cNvSpPr/>
           <p:nvPr/>
         </p:nvSpPr>
@@ -5058,11 +5265,13 @@
             <a:off x="822959" y="3017520"/>
             <a:ext cx="457200" cy="457200"/>
           </a:xfrm>
-          <a:prstGeom prst="ellipse">
-            <a:avLst/>
+          <a:prstGeom prst="roundRect">
+            <a:avLst>
+              <a:gd name="adj" fmla="val 25000"/>
+            </a:avLst>
           </a:prstGeom>
           <a:solidFill>
-            <a:srgbClr val="4ECA4E"/>
+            <a:srgbClr val="97ED97"/>
           </a:solidFill>
           <a:ln>
             <a:noFill/>
@@ -5082,7 +5291,7 @@
             <a:r>
               <a:rPr sz="1600" b="1" i="0">
                 <a:solidFill>
-                  <a:srgbClr val="FFFFFF"/>
+                  <a:srgbClr val="26231F"/>
                 </a:solidFill>
               </a:rPr>
               <a:t>2</a:t>
@@ -5092,7 +5301,7 @@
       </p:sp>
       <p:sp>
         <p:nvSpPr>
-          <p:cNvPr id="11" name="TextBox 10"/>
+          <p:cNvPr id="12" name="TextBox 11"/>
           <p:cNvSpPr txBox="1"/>
           <p:nvPr/>
         </p:nvSpPr>
@@ -5120,7 +5329,7 @@
             <a:r>
               <a:rPr sz="1800" b="1" i="0">
                 <a:solidFill>
-                  <a:srgbClr val="216E21"/>
+                  <a:srgbClr val="274927"/>
                 </a:solidFill>
               </a:rPr>
               <a:t>약속 2</a:t>
@@ -5130,7 +5339,7 @@
       </p:sp>
       <p:sp>
         <p:nvSpPr>
-          <p:cNvPr id="12" name="TextBox 11"/>
+          <p:cNvPr id="13" name="TextBox 12"/>
           <p:cNvSpPr txBox="1"/>
           <p:nvPr/>
         </p:nvSpPr>
@@ -5158,7 +5367,7 @@
             <a:r>
               <a:rPr sz="1700" b="0" i="0">
                 <a:solidFill>
-                  <a:srgbClr val="2B2B2B"/>
+                  <a:srgbClr val="26231F"/>
                 </a:solidFill>
               </a:rPr>
               <a:t>하루 십 분 나에게 쓰는 시간</a:t>
@@ -5168,7 +5377,7 @@
       </p:sp>
       <p:sp>
         <p:nvSpPr>
-          <p:cNvPr id="13" name="줄 3"/>
+          <p:cNvPr id="14" name="줄 3"/>
           <p:cNvSpPr/>
           <p:nvPr/>
         </p:nvSpPr>
@@ -5179,15 +5388,15 @@
           </a:xfrm>
           <a:prstGeom prst="roundRect">
             <a:avLst>
-              <a:gd name="adj" fmla="val 8000"/>
+              <a:gd name="adj" fmla="val 7000"/>
             </a:avLst>
           </a:prstGeom>
           <a:solidFill>
-            <a:srgbClr val="F3FCF3"/>
+            <a:srgbClr val="FFFFFF"/>
           </a:solidFill>
           <a:ln w="12700">
             <a:solidFill>
-              <a:srgbClr val="D4F7D4"/>
+              <a:srgbClr val="A6F2A6"/>
             </a:solidFill>
           </a:ln>
         </p:spPr>
@@ -5201,7 +5410,7 @@
       </p:sp>
       <p:sp>
         <p:nvSpPr>
-          <p:cNvPr id="14" name="번호 3"/>
+          <p:cNvPr id="15" name="번호 3"/>
           <p:cNvSpPr/>
           <p:nvPr/>
         </p:nvSpPr>
@@ -5210,11 +5419,13 @@
             <a:off x="822959" y="4160520"/>
             <a:ext cx="457200" cy="457200"/>
           </a:xfrm>
-          <a:prstGeom prst="ellipse">
-            <a:avLst/>
+          <a:prstGeom prst="roundRect">
+            <a:avLst>
+              <a:gd name="adj" fmla="val 25000"/>
+            </a:avLst>
           </a:prstGeom>
           <a:solidFill>
-            <a:srgbClr val="4ECA4E"/>
+            <a:srgbClr val="97ED97"/>
           </a:solidFill>
           <a:ln>
             <a:noFill/>
@@ -5234,7 +5445,7 @@
             <a:r>
               <a:rPr sz="1600" b="1" i="0">
                 <a:solidFill>
-                  <a:srgbClr val="FFFFFF"/>
+                  <a:srgbClr val="26231F"/>
                 </a:solidFill>
               </a:rPr>
               <a:t>3</a:t>
@@ -5244,7 +5455,7 @@
       </p:sp>
       <p:sp>
         <p:nvSpPr>
-          <p:cNvPr id="15" name="TextBox 14"/>
+          <p:cNvPr id="16" name="TextBox 15"/>
           <p:cNvSpPr txBox="1"/>
           <p:nvPr/>
         </p:nvSpPr>
@@ -5272,7 +5483,7 @@
             <a:r>
               <a:rPr sz="1800" b="1" i="0">
                 <a:solidFill>
-                  <a:srgbClr val="216E21"/>
+                  <a:srgbClr val="274927"/>
                 </a:solidFill>
               </a:rPr>
               <a:t>약속 3</a:t>
@@ -5282,7 +5493,7 @@
       </p:sp>
       <p:sp>
         <p:nvSpPr>
-          <p:cNvPr id="16" name="TextBox 15"/>
+          <p:cNvPr id="17" name="TextBox 16"/>
           <p:cNvSpPr txBox="1"/>
           <p:nvPr/>
         </p:nvSpPr>
@@ -5310,7 +5521,7 @@
             <a:r>
               <a:rPr sz="1700" b="0" i="0">
                 <a:solidFill>
-                  <a:srgbClr val="2B2B2B"/>
+                  <a:srgbClr val="26231F"/>
                 </a:solidFill>
               </a:rPr>
               <a:t>안부를 전할 사람 한 명 챙기기</a:t>
@@ -5332,7 +5543,7 @@
     <p:bg>
       <p:bgPr>
         <a:solidFill>
-          <a:srgbClr val="F3FCF3"/>
+          <a:srgbClr val="FFFFFF"/>
         </a:solidFill>
         <a:effectLst/>
       </p:bgPr>
@@ -5352,14 +5563,14 @@
         </p:nvSpPr>
         <p:spPr>
           <a:xfrm>
-            <a:off x="0" y="0"/>
-            <a:ext cx="12191695" cy="274320"/>
+            <a:off x="640080" y="6400800"/>
+            <a:ext cx="10911535" cy="10972"/>
           </a:xfrm>
           <a:prstGeom prst="rect">
             <a:avLst/>
           </a:prstGeom>
           <a:solidFill>
-            <a:srgbClr val="4ECA4E"/>
+            <a:srgbClr val="26231F"/>
           </a:solidFill>
           <a:ln>
             <a:noFill/>
@@ -5375,20 +5586,58 @@
       </p:sp>
       <p:sp>
         <p:nvSpPr>
-          <p:cNvPr id="4" name="장식"/>
+          <p:cNvPr id="4" name="하단 라벨"/>
+          <p:cNvSpPr txBox="1"/>
+          <p:nvPr/>
+        </p:nvSpPr>
+        <p:spPr>
+          <a:xfrm>
+            <a:off x="640080" y="6437376"/>
+            <a:ext cx="5486400" cy="274320"/>
+          </a:xfrm>
+          <a:prstGeom prst="rect">
+            <a:avLst/>
+          </a:prstGeom>
+          <a:noFill/>
+        </p:spPr>
+        <p:txBody>
+          <a:bodyPr wrap="square" lIns="54864" rIns="54864" tIns="27432" bIns="27432" anchor="ctr">
+            <a:noAutofit/>
+          </a:bodyPr>
+          <a:lstStyle/>
+          <a:p>
+            <a:pPr algn="l">
+              <a:lnSpc>
+                <a:spcPct val="115000"/>
+              </a:lnSpc>
+            </a:pPr>
+            <a:r>
+              <a:rPr sz="900" b="1" i="0" spc="250">
+                <a:solidFill>
+                  <a:srgbClr val="26231F"/>
+                </a:solidFill>
+              </a:rPr>
+              <a:t>FAMILY ALBUM</a:t>
+            </a:r>
+          </a:p>
+        </p:txBody>
+      </p:sp>
+      <p:sp>
+        <p:nvSpPr>
+          <p:cNvPr id="5" name="포인트"/>
           <p:cNvSpPr/>
           <p:nvPr/>
         </p:nvSpPr>
         <p:spPr>
-          <a:xfrm>
-            <a:off x="0" y="274320"/>
-            <a:ext cx="12191695" cy="54864"/>
-          </a:xfrm>
-          <a:prstGeom prst="rect">
+          <a:xfrm rot="18900000">
+            <a:off x="11213287" y="6473952"/>
+            <a:ext cx="219456" cy="219456"/>
+          </a:xfrm>
+          <a:prstGeom prst="teardrop">
             <a:avLst/>
           </a:prstGeom>
           <a:solidFill>
-            <a:srgbClr val="339941"/>
+            <a:srgbClr val="97ED97"/>
           </a:solidFill>
           <a:ln>
             <a:noFill/>
@@ -5414,8 +5663,8 @@
         </p:nvSpPr>
         <p:spPr>
           <a:xfrm>
-            <a:off x="640080" y="457200"/>
-            <a:ext cx="9722815" cy="868680"/>
+            <a:off x="640080" y="502920"/>
+            <a:ext cx="10911535" cy="914400"/>
           </a:xfrm>
         </p:spPr>
         <p:txBody>
@@ -5432,7 +5681,7 @@
             <a:r>
               <a:rPr sz="3000" b="1" i="0">
                 <a:solidFill>
-                  <a:srgbClr val="216E21"/>
+                  <a:srgbClr val="26231F"/>
                 </a:solidFill>
               </a:rPr>
               <a:t>가족 사진</a:t>
@@ -5442,14 +5691,14 @@
       </p:sp>
       <p:sp>
         <p:nvSpPr>
-          <p:cNvPr id="5" name="사진 자리"/>
+          <p:cNvPr id="6" name="사진 자리"/>
           <p:cNvSpPr/>
           <p:nvPr/>
         </p:nvSpPr>
         <p:spPr>
           <a:xfrm>
             <a:off x="640080" y="1600200"/>
-            <a:ext cx="3515258" cy="2308860"/>
+            <a:ext cx="3515258" cy="2194560"/>
           </a:xfrm>
           <a:prstGeom prst="roundRect">
             <a:avLst>
@@ -5457,12 +5706,10 @@
             </a:avLst>
           </a:prstGeom>
           <a:solidFill>
-            <a:srgbClr val="D4F7D4"/>
+            <a:srgbClr val="D1FAD1"/>
           </a:solidFill>
           <a:ln w="19050">
-            <a:solidFill>
-              <a:srgbClr val="4ECA4E"/>
-            </a:solidFill>
+            <a:noFill/>
             <a:prstDash val="dash"/>
           </a:ln>
         </p:spPr>
@@ -5480,7 +5727,7 @@
             <a:r>
               <a:rPr sz="1200" b="0" i="0">
                 <a:solidFill>
-                  <a:srgbClr val="216E21"/>
+                  <a:srgbClr val="8E8780"/>
                 </a:solidFill>
               </a:rPr>
               <a:t>사진 1</a:t>
@@ -5490,14 +5737,14 @@
       </p:sp>
       <p:sp>
         <p:nvSpPr>
-          <p:cNvPr id="6" name="사진 자리"/>
+          <p:cNvPr id="7" name="사진 자리"/>
           <p:cNvSpPr/>
           <p:nvPr/>
         </p:nvSpPr>
         <p:spPr>
           <a:xfrm>
             <a:off x="4338218" y="1600200"/>
-            <a:ext cx="3515258" cy="2308860"/>
+            <a:ext cx="3515258" cy="2194560"/>
           </a:xfrm>
           <a:prstGeom prst="roundRect">
             <a:avLst>
@@ -5505,12 +5752,10 @@
             </a:avLst>
           </a:prstGeom>
           <a:solidFill>
-            <a:srgbClr val="D4F7D4"/>
+            <a:srgbClr val="D1FAD1"/>
           </a:solidFill>
           <a:ln w="19050">
-            <a:solidFill>
-              <a:srgbClr val="4ECA4E"/>
-            </a:solidFill>
+            <a:noFill/>
             <a:prstDash val="dash"/>
           </a:ln>
         </p:spPr>
@@ -5528,7 +5773,7 @@
             <a:r>
               <a:rPr sz="1200" b="0" i="0">
                 <a:solidFill>
-                  <a:srgbClr val="216E21"/>
+                  <a:srgbClr val="8E8780"/>
                 </a:solidFill>
               </a:rPr>
               <a:t>사진 2</a:t>
@@ -5538,14 +5783,14 @@
       </p:sp>
       <p:sp>
         <p:nvSpPr>
-          <p:cNvPr id="7" name="사진 자리"/>
+          <p:cNvPr id="8" name="사진 자리"/>
           <p:cNvSpPr/>
           <p:nvPr/>
         </p:nvSpPr>
         <p:spPr>
           <a:xfrm>
             <a:off x="8036356" y="1600200"/>
-            <a:ext cx="3515258" cy="2308860"/>
+            <a:ext cx="3515258" cy="2194560"/>
           </a:xfrm>
           <a:prstGeom prst="roundRect">
             <a:avLst>
@@ -5553,12 +5798,10 @@
             </a:avLst>
           </a:prstGeom>
           <a:solidFill>
-            <a:srgbClr val="D4F7D4"/>
+            <a:srgbClr val="D1FAD1"/>
           </a:solidFill>
           <a:ln w="19050">
-            <a:solidFill>
-              <a:srgbClr val="4ECA4E"/>
-            </a:solidFill>
+            <a:noFill/>
             <a:prstDash val="dash"/>
           </a:ln>
         </p:spPr>
@@ -5576,7 +5819,7 @@
             <a:r>
               <a:rPr sz="1200" b="0" i="0">
                 <a:solidFill>
-                  <a:srgbClr val="216E21"/>
+                  <a:srgbClr val="8E8780"/>
                 </a:solidFill>
               </a:rPr>
               <a:t>사진 3</a:t>
@@ -5586,14 +5829,14 @@
       </p:sp>
       <p:sp>
         <p:nvSpPr>
-          <p:cNvPr id="8" name="사진 자리"/>
+          <p:cNvPr id="9" name="사진 자리"/>
           <p:cNvSpPr/>
           <p:nvPr/>
         </p:nvSpPr>
         <p:spPr>
           <a:xfrm>
-            <a:off x="640080" y="4091939"/>
-            <a:ext cx="3515258" cy="2308860"/>
+            <a:off x="640080" y="3977639"/>
+            <a:ext cx="3515258" cy="2194560"/>
           </a:xfrm>
           <a:prstGeom prst="roundRect">
             <a:avLst>
@@ -5601,12 +5844,10 @@
             </a:avLst>
           </a:prstGeom>
           <a:solidFill>
-            <a:srgbClr val="D4F7D4"/>
+            <a:srgbClr val="D1FAD1"/>
           </a:solidFill>
           <a:ln w="19050">
-            <a:solidFill>
-              <a:srgbClr val="4ECA4E"/>
-            </a:solidFill>
+            <a:noFill/>
             <a:prstDash val="dash"/>
           </a:ln>
         </p:spPr>
@@ -5624,7 +5865,7 @@
             <a:r>
               <a:rPr sz="1200" b="0" i="0">
                 <a:solidFill>
-                  <a:srgbClr val="216E21"/>
+                  <a:srgbClr val="8E8780"/>
                 </a:solidFill>
               </a:rPr>
               <a:t>사진 4</a:t>
@@ -5634,14 +5875,14 @@
       </p:sp>
       <p:sp>
         <p:nvSpPr>
-          <p:cNvPr id="9" name="사진 자리"/>
+          <p:cNvPr id="10" name="사진 자리"/>
           <p:cNvSpPr/>
           <p:nvPr/>
         </p:nvSpPr>
         <p:spPr>
           <a:xfrm>
-            <a:off x="4338218" y="4091939"/>
-            <a:ext cx="3515258" cy="2308860"/>
+            <a:off x="4338218" y="3977639"/>
+            <a:ext cx="3515258" cy="2194560"/>
           </a:xfrm>
           <a:prstGeom prst="roundRect">
             <a:avLst>
@@ -5649,12 +5890,10 @@
             </a:avLst>
           </a:prstGeom>
           <a:solidFill>
-            <a:srgbClr val="D4F7D4"/>
+            <a:srgbClr val="D1FAD1"/>
           </a:solidFill>
           <a:ln w="19050">
-            <a:solidFill>
-              <a:srgbClr val="4ECA4E"/>
-            </a:solidFill>
+            <a:noFill/>
             <a:prstDash val="dash"/>
           </a:ln>
         </p:spPr>
@@ -5672,7 +5911,7 @@
             <a:r>
               <a:rPr sz="1200" b="0" i="0">
                 <a:solidFill>
-                  <a:srgbClr val="216E21"/>
+                  <a:srgbClr val="8E8780"/>
                 </a:solidFill>
               </a:rPr>
               <a:t>사진 5</a:t>
@@ -5682,14 +5921,14 @@
       </p:sp>
       <p:sp>
         <p:nvSpPr>
-          <p:cNvPr id="10" name="사진 자리"/>
+          <p:cNvPr id="11" name="사진 자리"/>
           <p:cNvSpPr/>
           <p:nvPr/>
         </p:nvSpPr>
         <p:spPr>
           <a:xfrm>
-            <a:off x="8036356" y="4091939"/>
-            <a:ext cx="3515258" cy="2308860"/>
+            <a:off x="8036356" y="3977639"/>
+            <a:ext cx="3515258" cy="2194560"/>
           </a:xfrm>
           <a:prstGeom prst="roundRect">
             <a:avLst>
@@ -5697,12 +5936,10 @@
             </a:avLst>
           </a:prstGeom>
           <a:solidFill>
-            <a:srgbClr val="D4F7D4"/>
+            <a:srgbClr val="D1FAD1"/>
           </a:solidFill>
           <a:ln w="19050">
-            <a:solidFill>
-              <a:srgbClr val="4ECA4E"/>
-            </a:solidFill>
+            <a:noFill/>
             <a:prstDash val="dash"/>
           </a:ln>
         </p:spPr>
@@ -5720,7 +5957,7 @@
             <a:r>
               <a:rPr sz="1200" b="0" i="0">
                 <a:solidFill>
-                  <a:srgbClr val="216E21"/>
+                  <a:srgbClr val="8E8780"/>
                 </a:solidFill>
               </a:rPr>
               <a:t>사진 6</a:t>
@@ -5739,6 +5976,14 @@
 <file path=ppt/slides/slide6.xml><?xml version="1.0" encoding="utf-8"?>
 <p:sld xmlns:a="http://schemas.openxmlformats.org/drawingml/2006/main" xmlns:p="http://schemas.openxmlformats.org/presentationml/2006/main" xmlns:r="http://schemas.openxmlformats.org/officeDocument/2006/relationships">
   <p:cSld>
+    <p:bg>
+      <p:bgPr>
+        <a:solidFill>
+          <a:srgbClr val="EAFDEA"/>
+        </a:solidFill>
+        <a:effectLst/>
+      </p:bgPr>
+    </p:bg>
     <p:spTree>
       <p:nvGrpSpPr>
         <p:cNvPr id="1" name=""/>
@@ -5746,30 +5991,119 @@
         <p:nvPr/>
       </p:nvGrpSpPr>
       <p:grpSpPr/>
-      <p:pic>
-        <p:nvPicPr>
-          <p:cNvPr id="3" name="표지 그림" descr="family-09.jpg"/>
-          <p:cNvPicPr>
-            <a:picLocks noChangeAspect="1"/>
-          </p:cNvPicPr>
+      <p:sp>
+        <p:nvSpPr>
+          <p:cNvPr id="3" name="사진 자리"/>
+          <p:cNvSpPr/>
           <p:nvPr/>
-        </p:nvPicPr>
-        <p:blipFill>
-          <a:blip r:embed="rId2"/>
-          <a:stretch>
-            <a:fillRect/>
-          </a:stretch>
-        </p:blipFill>
-        <p:spPr>
-          <a:xfrm>
-            <a:off x="0" y="0"/>
-            <a:ext cx="12191695" cy="6858000"/>
+        </p:nvSpPr>
+        <p:spPr>
+          <a:xfrm>
+            <a:off x="1463003" y="685800"/>
+            <a:ext cx="3169840" cy="5486400"/>
+          </a:xfrm>
+          <a:prstGeom prst="round2SameRect">
+            <a:avLst>
+              <a:gd name="adj1" fmla="val 50000"/>
+              <a:gd name="adj2" fmla="val 0"/>
+            </a:avLst>
+          </a:prstGeom>
+          <a:solidFill>
+            <a:srgbClr val="A6F2A6"/>
+          </a:solidFill>
+          <a:ln>
+            <a:noFill/>
+          </a:ln>
+        </p:spPr>
+        <p:txBody>
+          <a:bodyPr rtlCol="0" anchor="ctr" wrap="square" lIns="54864" rIns="54864" tIns="27432" bIns="27432">
+            <a:noAutofit/>
+          </a:bodyPr>
+          <a:lstStyle/>
+          <a:p>
+            <a:pPr algn="ctr">
+              <a:lnSpc>
+                <a:spcPct val="100000"/>
+              </a:lnSpc>
+            </a:pPr>
+            <a:r>
+              <a:rPr sz="1400" b="0" i="0">
+                <a:solidFill>
+                  <a:srgbClr val="274927"/>
+                </a:solidFill>
+              </a:rPr>
+              <a:t>사진을 넣어 주세요</a:t>
+            </a:r>
+          </a:p>
+        </p:txBody>
+      </p:sp>
+      <p:sp>
+        <p:nvSpPr>
+          <p:cNvPr id="4" name="장식"/>
+          <p:cNvSpPr/>
+          <p:nvPr/>
+        </p:nvSpPr>
+        <p:spPr>
+          <a:xfrm>
+            <a:off x="4358505" y="4251960"/>
+            <a:ext cx="1005840" cy="1005840"/>
+          </a:xfrm>
+          <a:prstGeom prst="ellipse">
+            <a:avLst/>
+          </a:prstGeom>
+          <a:solidFill>
+            <a:srgbClr val="A6F2A6"/>
+          </a:solidFill>
+          <a:ln>
+            <a:noFill/>
+          </a:ln>
+        </p:spPr>
+        <p:txBody>
+          <a:bodyPr rtlCol="0" anchor="ctr"/>
+          <a:lstStyle/>
+          <a:p>
+            <a:pPr algn="ctr"/>
+          </a:p>
+        </p:txBody>
+      </p:sp>
+      <p:sp>
+        <p:nvSpPr>
+          <p:cNvPr id="5" name="라벨"/>
+          <p:cNvSpPr txBox="1"/>
+          <p:nvPr/>
+        </p:nvSpPr>
+        <p:spPr>
+          <a:xfrm>
+            <a:off x="6827349" y="2148840"/>
+            <a:ext cx="4632844" cy="274320"/>
           </a:xfrm>
           <a:prstGeom prst="rect">
             <a:avLst/>
           </a:prstGeom>
-        </p:spPr>
-      </p:pic>
+          <a:noFill/>
+        </p:spPr>
+        <p:txBody>
+          <a:bodyPr wrap="square" lIns="54864" rIns="54864" tIns="27432" bIns="27432" anchor="t">
+            <a:noAutofit/>
+          </a:bodyPr>
+          <a:lstStyle/>
+          <a:p>
+            <a:pPr algn="l">
+              <a:lnSpc>
+                <a:spcPct val="115000"/>
+              </a:lnSpc>
+            </a:pPr>
+            <a:r>
+              <a:rPr sz="1000" b="1" i="0" spc="250">
+                <a:solidFill>
+                  <a:srgbClr val="26231F"/>
+                </a:solidFill>
+              </a:rPr>
+              <a:t>FAMILY ALBUM</a:t>
+            </a:r>
+          </a:p>
+        </p:txBody>
+      </p:sp>
       <p:sp>
         <p:nvSpPr>
           <p:cNvPr id="2" name="Title 1"/>
@@ -5782,8 +6116,8 @@
         </p:nvSpPr>
         <p:spPr>
           <a:xfrm>
-            <a:off x="853418" y="2057400"/>
-            <a:ext cx="6095847" cy="1554480"/>
+            <a:off x="6827349" y="2606040"/>
+            <a:ext cx="4632844" cy="1188720"/>
           </a:xfrm>
         </p:spPr>
         <p:txBody>
@@ -5798,9 +6132,9 @@
               </a:lnSpc>
             </a:pPr>
             <a:r>
-              <a:rPr sz="3600" b="1" i="0">
-                <a:solidFill>
-                  <a:srgbClr val="216E21"/>
+              <a:rPr sz="4000" b="1" i="0">
+                <a:solidFill>
+                  <a:srgbClr val="26231F"/>
                 </a:solidFill>
               </a:rPr>
               <a:t>우리 가족 소개를 마칩니다</a:t>
@@ -5810,14 +6144,14 @@
       </p:sp>
       <p:sp>
         <p:nvSpPr>
-          <p:cNvPr id="4" name="한 줄 문구"/>
+          <p:cNvPr id="6" name="한 줄 문구"/>
           <p:cNvSpPr txBox="1"/>
           <p:nvPr/>
         </p:nvSpPr>
         <p:spPr>
           <a:xfrm>
-            <a:off x="853418" y="3749039"/>
-            <a:ext cx="6095847" cy="822960"/>
+            <a:off x="6827349" y="3886200"/>
+            <a:ext cx="4632844" cy="822960"/>
           </a:xfrm>
           <a:prstGeom prst="rect">
             <a:avLst/>
@@ -5836,9 +6170,9 @@
               </a:lnSpc>
             </a:pPr>
             <a:r>
-              <a:rPr sz="1700" b="0" i="1">
-                <a:solidFill>
-                  <a:srgbClr val="216E21"/>
+              <a:rPr sz="1700" b="0" i="0">
+                <a:solidFill>
+                  <a:srgbClr val="26231F"/>
                 </a:solidFill>
               </a:rPr>
               <a:t>읽어 주셔서 고맙습니다</a:t>
@@ -5848,14 +6182,14 @@
       </p:sp>
       <p:sp>
         <p:nvSpPr>
-          <p:cNvPr id="5" name="안내 문구"/>
+          <p:cNvPr id="7" name="안내 문구"/>
           <p:cNvSpPr txBox="1"/>
           <p:nvPr/>
         </p:nvSpPr>
         <p:spPr>
           <a:xfrm>
-            <a:off x="853418" y="4617720"/>
-            <a:ext cx="6095847" cy="914400"/>
+            <a:off x="6827349" y="4754880"/>
+            <a:ext cx="4632844" cy="914400"/>
           </a:xfrm>
           <a:prstGeom prst="rect">
             <a:avLst/>
@@ -5876,7 +6210,7 @@
             <a:r>
               <a:rPr sz="1400" b="0" i="0">
                 <a:solidFill>
-                  <a:srgbClr val="666666"/>
+                  <a:srgbClr val="26231F"/>
                 </a:solidFill>
               </a:rPr>
               <a:t>고맙습니다 · 가족 이름</a:t>
@@ -5903,34 +6237,34 @@
         <a:sysClr val="window" lastClr="FFFFFF"/>
       </a:lt1>
       <a:dk2>
-        <a:srgbClr val="216E21"/>
+        <a:srgbClr val="274927"/>
       </a:dk2>
       <a:lt2>
-        <a:srgbClr val="F3FCF3"/>
+        <a:srgbClr val="EAFDEA"/>
       </a:lt2>
       <a:accent1>
-        <a:srgbClr val="4ECA4E"/>
+        <a:srgbClr val="97ED97"/>
       </a:accent1>
       <a:accent2>
-        <a:srgbClr val="339941"/>
+        <a:srgbClr val="BAF3D4"/>
       </a:accent2>
       <a:accent3>
-        <a:srgbClr val="216E21"/>
+        <a:srgbClr val="274927"/>
       </a:accent3>
       <a:accent4>
-        <a:srgbClr val="D4F7D4"/>
+        <a:srgbClr val="D1FAD1"/>
       </a:accent4>
       <a:accent5>
-        <a:srgbClr val="40B248"/>
+        <a:srgbClr val="A8F0B6"/>
       </a:accent5>
       <a:accent6>
-        <a:srgbClr val="7AA87A"/>
+        <a:srgbClr val="7D927D"/>
       </a:accent6>
       <a:hlink>
-        <a:srgbClr val="4ECA4E"/>
+        <a:srgbClr val="97ED97"/>
       </a:hlink>
       <a:folHlink>
-        <a:srgbClr val="216E21"/>
+        <a:srgbClr val="274927"/>
       </a:folHlink>
     </a:clrScheme>
     <a:fontScheme name="Office">
